--- a/clase/CIRTECAL_clase_metodo.pptx
+++ b/clase/CIRTECAL_clase_metodo.pptx
@@ -7052,7 +7052,7 @@
                 <a:ea typeface="Calibri" pitchFamily="34" charset="-122"/>
                 <a:cs typeface="Calibri" pitchFamily="34" charset="-120"/>
               </a:rPr>
-              <a:t>Códigos sin predecesor.  </a:t>
+              <a:t>Códigos que se parten.  </a:t>
             </a:r>
             <a:pPr indent="0" marL="0">
               <a:lnSpc>
@@ -7069,7 +7069,7 @@
                 <a:ea typeface="Calibri" pitchFamily="34" charset="-122"/>
                 <a:cs typeface="Calibri" pitchFamily="34" charset="-120"/>
               </a:rPr>
-              <a:t>8471.70.40 (SSD) y 9403.20.90 (racks): no leer crecimientos antes de resolverlos.</a:t>
+              <a:t>Los SSD (8471.70.40) nacen en 2024 de 8471.70.90: el «nuevo» código es una mudanza, no un crecimiento. Se leen sumados.</a:t>
             </a:r>
             <a:endParaRPr lang="en-US" sz="1150" dirty="0"/>
           </a:p>
